--- a/docs/demos/euskadi-ejie-2026.pptx
+++ b/docs/demos/euskadi-ejie-2026.pptx
@@ -1730,6 +1730,12 @@
           <a:p>
             <a:r>
               <a:t>For a regional pilot in the Basque Country we estimate 0.8 to 1.5 million euros to build. Operations then cost about 15 to 25 percent of that every year. That is roughly 120,000 to 375,000 euros a year.</a:t>
+            </a:r>
+          </a:p>
+          <a:p/>
+          <a:p>
+            <a:r>
+              <a:t>For hosting we plan three environments: production, test and development, at about 1,000 euros a month each. That is 3,000 euros a month, or 36,000 euros a year. On top of that come the SDLC and developer tools: CI/CD, repositories, testing and security scanning.</a:t>
             </a:r>
           </a:p>
         </p:txBody>
@@ -41909,7 +41915,7 @@
         <p:spPr>
           <a:xfrm>
             <a:off x="548640" y="4572000"/>
-            <a:ext cx="5440680" cy="1691640"/>
+            <a:ext cx="3566160" cy="1691640"/>
           </a:xfrm>
           <a:prstGeom prst="roundRect">
             <a:avLst>
@@ -41998,8 +42004,8 @@
         </p:nvSpPr>
         <p:spPr>
           <a:xfrm>
-            <a:off x="914400" y="4709160"/>
-            <a:ext cx="4846320" cy="685800"/>
+            <a:off x="868680" y="4663440"/>
+            <a:ext cx="3108960" cy="548640"/>
           </a:xfrm>
           <a:prstGeom prst="rect">
             <a:avLst/>
@@ -42018,7 +42024,7 @@
               </a:lnSpc>
             </a:pPr>
             <a:r>
-              <a:rPr sz="3400" b="1">
+              <a:rPr sz="2600" b="1">
                 <a:solidFill>
                   <a:srgbClr val="FFFFFF"/>
                 </a:solidFill>
@@ -42037,8 +42043,8 @@
         </p:nvSpPr>
         <p:spPr>
           <a:xfrm>
-            <a:off x="914400" y="5440680"/>
-            <a:ext cx="4846320" cy="365760"/>
+            <a:off x="868680" y="5230368"/>
+            <a:ext cx="3108960" cy="320040"/>
           </a:xfrm>
           <a:prstGeom prst="rect">
             <a:avLst/>
@@ -42057,7 +42063,7 @@
               </a:lnSpc>
             </a:pPr>
             <a:r>
-              <a:rPr sz="1600" b="1">
+              <a:rPr sz="1500" b="1">
                 <a:solidFill>
                   <a:srgbClr val="E6A817"/>
                 </a:solidFill>
@@ -42076,8 +42082,8 @@
         </p:nvSpPr>
         <p:spPr>
           <a:xfrm>
-            <a:off x="914400" y="5806440"/>
-            <a:ext cx="4846320" cy="365760"/>
+            <a:off x="868680" y="5559552"/>
+            <a:ext cx="3108960" cy="640080"/>
           </a:xfrm>
           <a:prstGeom prst="rect">
             <a:avLst/>
@@ -42092,17 +42098,17 @@
           <a:p>
             <a:pPr>
               <a:lnSpc>
-                <a:spcPct val="100000"/>
+                <a:spcPct val="105000"/>
               </a:lnSpc>
             </a:pPr>
             <a:r>
-              <a:rPr sz="1300" b="0">
+              <a:rPr sz="1200" b="0">
                 <a:solidFill>
                   <a:srgbClr val="FFFFFF"/>
                 </a:solidFill>
                 <a:latin typeface="Calibri"/>
               </a:rPr>
-              <a:t>Engineering, hosting, onboarding.</a:t>
+              <a:t>Engineering and onboarding.</a:t>
             </a:r>
           </a:p>
         </p:txBody>
@@ -42115,8 +42121,8 @@
         </p:nvSpPr>
         <p:spPr>
           <a:xfrm>
-            <a:off x="6199631" y="4572000"/>
-            <a:ext cx="5440680" cy="1691640"/>
+            <a:off x="4315968" y="4572000"/>
+            <a:ext cx="3566160" cy="1691640"/>
           </a:xfrm>
           <a:prstGeom prst="roundRect">
             <a:avLst>
@@ -42161,7 +42167,7 @@
         </p:nvSpPr>
         <p:spPr>
           <a:xfrm>
-            <a:off x="6199631" y="4572000"/>
+            <a:off x="4315968" y="4572000"/>
             <a:ext cx="109728" cy="1691640"/>
           </a:xfrm>
           <a:prstGeom prst="rect">
@@ -42205,8 +42211,8 @@
         </p:nvSpPr>
         <p:spPr>
           <a:xfrm>
-            <a:off x="6565392" y="4709160"/>
-            <a:ext cx="4846320" cy="685800"/>
+            <a:off x="4636007" y="4663440"/>
+            <a:ext cx="3108960" cy="548640"/>
           </a:xfrm>
           <a:prstGeom prst="rect">
             <a:avLst/>
@@ -42225,13 +42231,13 @@
               </a:lnSpc>
             </a:pPr>
             <a:r>
-              <a:rPr sz="3400" b="1">
+              <a:rPr sz="2600" b="1">
                 <a:solidFill>
                   <a:srgbClr val="FFFFFF"/>
                 </a:solidFill>
                 <a:latin typeface="Calibri"/>
               </a:rPr>
-              <a:t>15 – 25% per year</a:t>
+              <a:t>15 – 25% a year</a:t>
             </a:r>
           </a:p>
         </p:txBody>
@@ -42244,8 +42250,8 @@
         </p:nvSpPr>
         <p:spPr>
           <a:xfrm>
-            <a:off x="6565392" y="5440680"/>
-            <a:ext cx="4846320" cy="365760"/>
+            <a:off x="4636007" y="5230368"/>
+            <a:ext cx="3108960" cy="320040"/>
           </a:xfrm>
           <a:prstGeom prst="rect">
             <a:avLst/>
@@ -42264,7 +42270,7 @@
               </a:lnSpc>
             </a:pPr>
             <a:r>
-              <a:rPr sz="1600" b="1">
+              <a:rPr sz="1500" b="1">
                 <a:solidFill>
                   <a:srgbClr val="E6A817"/>
                 </a:solidFill>
@@ -42283,8 +42289,137 @@
         </p:nvSpPr>
         <p:spPr>
           <a:xfrm>
-            <a:off x="6565392" y="5806440"/>
-            <a:ext cx="4846320" cy="365760"/>
+            <a:off x="4636007" y="5559552"/>
+            <a:ext cx="3108960" cy="640080"/>
+          </a:xfrm>
+          <a:prstGeom prst="rect">
+            <a:avLst/>
+          </a:prstGeom>
+          <a:noFill/>
+        </p:spPr>
+        <p:txBody>
+          <a:bodyPr wrap="square" lIns="0" rIns="0" tIns="0" bIns="0">
+            <a:spAutoFit/>
+          </a:bodyPr>
+          <a:lstStyle/>
+          <a:p>
+            <a:pPr>
+              <a:lnSpc>
+                <a:spcPct val="105000"/>
+              </a:lnSpc>
+            </a:pPr>
+            <a:r>
+              <a:rPr sz="1200" b="0">
+                <a:solidFill>
+                  <a:srgbClr val="FFFFFF"/>
+                </a:solidFill>
+                <a:latin typeface="Calibri"/>
+              </a:rPr>
+              <a:t>Of the build cost: about €120,000 – 375,000 a year.</a:t>
+            </a:r>
+          </a:p>
+        </p:txBody>
+      </p:sp>
+      <p:sp>
+        <p:nvSpPr>
+          <p:cNvPr id="43" name="Rounded Rectangle 42"/>
+          <p:cNvSpPr/>
+          <p:nvPr/>
+        </p:nvSpPr>
+        <p:spPr>
+          <a:xfrm>
+            <a:off x="8083296" y="4572000"/>
+            <a:ext cx="3566160" cy="1691640"/>
+          </a:xfrm>
+          <a:prstGeom prst="roundRect">
+            <a:avLst>
+              <a:gd name="adj" fmla="val 5000"/>
+            </a:avLst>
+          </a:prstGeom>
+          <a:solidFill>
+            <a:srgbClr val="143D59"/>
+          </a:solidFill>
+          <a:ln>
+            <a:noFill/>
+          </a:ln>
+          <a:effectLst/>
+        </p:spPr>
+        <p:style>
+          <a:lnRef idx="1">
+            <a:schemeClr val="accent1"/>
+          </a:lnRef>
+          <a:fillRef idx="3">
+            <a:schemeClr val="accent1"/>
+          </a:fillRef>
+          <a:effectRef idx="2">
+            <a:schemeClr val="accent1"/>
+          </a:effectRef>
+          <a:fontRef idx="minor">
+            <a:schemeClr val="lt1"/>
+          </a:fontRef>
+        </p:style>
+        <p:txBody>
+          <a:bodyPr rtlCol="0" anchor="ctr"/>
+          <a:lstStyle/>
+          <a:p>
+            <a:pPr algn="ctr"/>
+          </a:p>
+        </p:txBody>
+      </p:sp>
+      <p:sp>
+        <p:nvSpPr>
+          <p:cNvPr id="44" name="Rectangle 43"/>
+          <p:cNvSpPr/>
+          <p:nvPr/>
+        </p:nvSpPr>
+        <p:spPr>
+          <a:xfrm>
+            <a:off x="8083296" y="4572000"/>
+            <a:ext cx="109728" cy="1691640"/>
+          </a:xfrm>
+          <a:prstGeom prst="rect">
+            <a:avLst/>
+          </a:prstGeom>
+          <a:solidFill>
+            <a:srgbClr val="E6A817"/>
+          </a:solidFill>
+          <a:ln>
+            <a:noFill/>
+          </a:ln>
+          <a:effectLst/>
+        </p:spPr>
+        <p:style>
+          <a:lnRef idx="1">
+            <a:schemeClr val="accent1"/>
+          </a:lnRef>
+          <a:fillRef idx="3">
+            <a:schemeClr val="accent1"/>
+          </a:fillRef>
+          <a:effectRef idx="2">
+            <a:schemeClr val="accent1"/>
+          </a:effectRef>
+          <a:fontRef idx="minor">
+            <a:schemeClr val="lt1"/>
+          </a:fontRef>
+        </p:style>
+        <p:txBody>
+          <a:bodyPr rtlCol="0" anchor="ctr"/>
+          <a:lstStyle/>
+          <a:p>
+            <a:pPr algn="ctr"/>
+          </a:p>
+        </p:txBody>
+      </p:sp>
+      <p:sp>
+        <p:nvSpPr>
+          <p:cNvPr id="45" name="TextBox 44"/>
+          <p:cNvSpPr txBox="1"/>
+          <p:nvPr/>
+        </p:nvSpPr>
+        <p:spPr>
+          <a:xfrm>
+            <a:off x="8403336" y="4663440"/>
+            <a:ext cx="3108960" cy="548640"/>
           </a:xfrm>
           <a:prstGeom prst="rect">
             <a:avLst/>
@@ -42303,20 +42438,98 @@
               </a:lnSpc>
             </a:pPr>
             <a:r>
-              <a:rPr sz="1300" b="0">
+              <a:rPr sz="2600" b="1">
                 <a:solidFill>
                   <a:srgbClr val="FFFFFF"/>
                 </a:solidFill>
                 <a:latin typeface="Calibri"/>
               </a:rPr>
-              <a:t>About €120,000 – 375,000 a year.</a:t>
-            </a:r>
-          </a:p>
-        </p:txBody>
-      </p:sp>
-      <p:sp>
-        <p:nvSpPr>
-          <p:cNvPr id="43" name="TextBox 42"/>
+              <a:t>€3,000 a month</a:t>
+            </a:r>
+          </a:p>
+        </p:txBody>
+      </p:sp>
+      <p:sp>
+        <p:nvSpPr>
+          <p:cNvPr id="46" name="TextBox 45"/>
+          <p:cNvSpPr txBox="1"/>
+          <p:nvPr/>
+        </p:nvSpPr>
+        <p:spPr>
+          <a:xfrm>
+            <a:off x="8403336" y="5230368"/>
+            <a:ext cx="3108960" cy="320040"/>
+          </a:xfrm>
+          <a:prstGeom prst="rect">
+            <a:avLst/>
+          </a:prstGeom>
+          <a:noFill/>
+        </p:spPr>
+        <p:txBody>
+          <a:bodyPr wrap="square" lIns="0" rIns="0" tIns="0" bIns="0">
+            <a:spAutoFit/>
+          </a:bodyPr>
+          <a:lstStyle/>
+          <a:p>
+            <a:pPr>
+              <a:lnSpc>
+                <a:spcPct val="100000"/>
+              </a:lnSpc>
+            </a:pPr>
+            <a:r>
+              <a:rPr sz="1500" b="1">
+                <a:solidFill>
+                  <a:srgbClr val="E6A817"/>
+                </a:solidFill>
+                <a:latin typeface="Calibri"/>
+              </a:rPr>
+              <a:t>Hosting: prod, test and dev</a:t>
+            </a:r>
+          </a:p>
+        </p:txBody>
+      </p:sp>
+      <p:sp>
+        <p:nvSpPr>
+          <p:cNvPr id="47" name="TextBox 46"/>
+          <p:cNvSpPr txBox="1"/>
+          <p:nvPr/>
+        </p:nvSpPr>
+        <p:spPr>
+          <a:xfrm>
+            <a:off x="8403336" y="5559552"/>
+            <a:ext cx="3108960" cy="640080"/>
+          </a:xfrm>
+          <a:prstGeom prst="rect">
+            <a:avLst/>
+          </a:prstGeom>
+          <a:noFill/>
+        </p:spPr>
+        <p:txBody>
+          <a:bodyPr wrap="square" lIns="0" rIns="0" tIns="0" bIns="0">
+            <a:spAutoFit/>
+          </a:bodyPr>
+          <a:lstStyle/>
+          <a:p>
+            <a:pPr>
+              <a:lnSpc>
+                <a:spcPct val="105000"/>
+              </a:lnSpc>
+            </a:pPr>
+            <a:r>
+              <a:rPr sz="1200" b="0">
+                <a:solidFill>
+                  <a:srgbClr val="FFFFFF"/>
+                </a:solidFill>
+                <a:latin typeface="Calibri"/>
+              </a:rPr>
+              <a:t>€1,000 per environment, €36,000 a year. Plus SDLC and developer tools.</a:t>
+            </a:r>
+          </a:p>
+        </p:txBody>
+      </p:sp>
+      <p:sp>
+        <p:nvSpPr>
+          <p:cNvPr id="48" name="TextBox 47"/>
           <p:cNvSpPr txBox="1"/>
           <p:nvPr/>
         </p:nvSpPr>
@@ -42370,7 +42583,7 @@
               <p:cTn id="2" dur="indefinite" nodeType="mainSeq">
                 <p:childTnLst>
                   <p:par>
-                    <p:cTn id="91" fill="hold">
+                    <p:cTn id="107" fill="hold">
                       <p:stCondLst>
                         <p:cond delay="indefinite"/>
                         <p:cond evt="onBegin" delay="0">
@@ -43029,7 +43242,7 @@
                                           </p:stCondLst>
                                         </p:cTn>
                                         <p:tgtEl>
-                                          <p:spTgt spid="35"/>
+                                          <p:spTgt spid="37"/>
                                         </p:tgtEl>
                                         <p:attrNameLst>
                                           <p:attrName>style.visibility</p:attrName>
@@ -43043,7 +43256,7 @@
                                       <p:cBhvr>
                                         <p:cTn id="60" dur="500"/>
                                         <p:tgtEl>
-                                          <p:spTgt spid="35"/>
+                                          <p:spTgt spid="37"/>
                                         </p:tgtEl>
                                       </p:cBhvr>
                                     </p:animEffect>
@@ -43064,7 +43277,7 @@
                                           </p:stCondLst>
                                         </p:cTn>
                                         <p:tgtEl>
-                                          <p:spTgt spid="36"/>
+                                          <p:spTgt spid="35"/>
                                         </p:tgtEl>
                                         <p:attrNameLst>
                                           <p:attrName>style.visibility</p:attrName>
@@ -43078,7 +43291,7 @@
                                       <p:cBhvr>
                                         <p:cTn id="63" dur="500"/>
                                         <p:tgtEl>
-                                          <p:spTgt spid="36"/>
+                                          <p:spTgt spid="35"/>
                                         </p:tgtEl>
                                       </p:cBhvr>
                                     </p:animEffect>
@@ -43099,7 +43312,7 @@
                                           </p:stCondLst>
                                         </p:cTn>
                                         <p:tgtEl>
-                                          <p:spTgt spid="37"/>
+                                          <p:spTgt spid="36"/>
                                         </p:tgtEl>
                                         <p:attrNameLst>
                                           <p:attrName>style.visibility</p:attrName>
@@ -43113,7 +43326,7 @@
                                       <p:cBhvr>
                                         <p:cTn id="66" dur="500"/>
                                         <p:tgtEl>
-                                          <p:spTgt spid="37"/>
+                                          <p:spTgt spid="36"/>
                                         </p:tgtEl>
                                       </p:cBhvr>
                                     </p:animEffect>
@@ -43257,7 +43470,7 @@
                                           </p:stCondLst>
                                         </p:cTn>
                                         <p:tgtEl>
-                                          <p:spTgt spid="40"/>
+                                          <p:spTgt spid="42"/>
                                         </p:tgtEl>
                                         <p:attrNameLst>
                                           <p:attrName>style.visibility</p:attrName>
@@ -43271,7 +43484,7 @@
                                       <p:cBhvr>
                                         <p:cTn id="80" dur="500"/>
                                         <p:tgtEl>
-                                          <p:spTgt spid="40"/>
+                                          <p:spTgt spid="42"/>
                                         </p:tgtEl>
                                       </p:cBhvr>
                                     </p:animEffect>
@@ -43292,7 +43505,7 @@
                                           </p:stCondLst>
                                         </p:cTn>
                                         <p:tgtEl>
-                                          <p:spTgt spid="41"/>
+                                          <p:spTgt spid="40"/>
                                         </p:tgtEl>
                                         <p:attrNameLst>
                                           <p:attrName>style.visibility</p:attrName>
@@ -43306,7 +43519,7 @@
                                       <p:cBhvr>
                                         <p:cTn id="83" dur="500"/>
                                         <p:tgtEl>
-                                          <p:spTgt spid="41"/>
+                                          <p:spTgt spid="40"/>
                                         </p:tgtEl>
                                       </p:cBhvr>
                                     </p:animEffect>
@@ -43327,7 +43540,7 @@
                                           </p:stCondLst>
                                         </p:cTn>
                                         <p:tgtEl>
-                                          <p:spTgt spid="42"/>
+                                          <p:spTgt spid="41"/>
                                         </p:tgtEl>
                                         <p:attrNameLst>
                                           <p:attrName>style.visibility</p:attrName>
@@ -43341,7 +43554,7 @@
                                       <p:cBhvr>
                                         <p:cTn id="86" dur="500"/>
                                         <p:tgtEl>
-                                          <p:spTgt spid="42"/>
+                                          <p:spTgt spid="41"/>
                                         </p:tgtEl>
                                       </p:cBhvr>
                                     </p:animEffect>
@@ -43377,6 +43590,190 @@
                                         <p:cTn id="89" dur="500"/>
                                         <p:tgtEl>
                                           <p:spTgt spid="39"/>
+                                        </p:tgtEl>
+                                      </p:cBhvr>
+                                    </p:animEffect>
+                                  </p:childTnLst>
+                                </p:cTn>
+                              </p:par>
+                            </p:childTnLst>
+                          </p:cTn>
+                        </p:par>
+                        <p:par>
+                          <p:cTn id="106" fill="hold">
+                            <p:stCondLst>
+                              <p:cond delay="2100"/>
+                            </p:stCondLst>
+                            <p:childTnLst>
+                              <p:par>
+                                <p:cTn id="91" presetID="10" presetClass="entr" presetSubtype="0" fill="hold" grpId="0" nodeType="withEffect">
+                                  <p:stCondLst>
+                                    <p:cond delay="0"/>
+                                  </p:stCondLst>
+                                  <p:childTnLst>
+                                    <p:set>
+                                      <p:cBhvr>
+                                        <p:cTn id="92" dur="1" fill="hold">
+                                          <p:stCondLst>
+                                            <p:cond delay="0"/>
+                                          </p:stCondLst>
+                                        </p:cTn>
+                                        <p:tgtEl>
+                                          <p:spTgt spid="43"/>
+                                        </p:tgtEl>
+                                        <p:attrNameLst>
+                                          <p:attrName>style.visibility</p:attrName>
+                                        </p:attrNameLst>
+                                      </p:cBhvr>
+                                      <p:to>
+                                        <p:strVal val="visible"/>
+                                      </p:to>
+                                    </p:set>
+                                    <p:animEffect transition="in" filter="fade">
+                                      <p:cBhvr>
+                                        <p:cTn id="93" dur="500"/>
+                                        <p:tgtEl>
+                                          <p:spTgt spid="43"/>
+                                        </p:tgtEl>
+                                      </p:cBhvr>
+                                    </p:animEffect>
+                                  </p:childTnLst>
+                                </p:cTn>
+                              </p:par>
+                              <p:par>
+                                <p:cTn id="94" presetID="10" presetClass="entr" presetSubtype="0" fill="hold" grpId="0" nodeType="withEffect">
+                                  <p:stCondLst>
+                                    <p:cond delay="0"/>
+                                  </p:stCondLst>
+                                  <p:childTnLst>
+                                    <p:set>
+                                      <p:cBhvr>
+                                        <p:cTn id="95" dur="1" fill="hold">
+                                          <p:stCondLst>
+                                            <p:cond delay="0"/>
+                                          </p:stCondLst>
+                                        </p:cTn>
+                                        <p:tgtEl>
+                                          <p:spTgt spid="47"/>
+                                        </p:tgtEl>
+                                        <p:attrNameLst>
+                                          <p:attrName>style.visibility</p:attrName>
+                                        </p:attrNameLst>
+                                      </p:cBhvr>
+                                      <p:to>
+                                        <p:strVal val="visible"/>
+                                      </p:to>
+                                    </p:set>
+                                    <p:animEffect transition="in" filter="fade">
+                                      <p:cBhvr>
+                                        <p:cTn id="96" dur="500"/>
+                                        <p:tgtEl>
+                                          <p:spTgt spid="47"/>
+                                        </p:tgtEl>
+                                      </p:cBhvr>
+                                    </p:animEffect>
+                                  </p:childTnLst>
+                                </p:cTn>
+                              </p:par>
+                              <p:par>
+                                <p:cTn id="97" presetID="10" presetClass="entr" presetSubtype="0" fill="hold" grpId="0" nodeType="withEffect">
+                                  <p:stCondLst>
+                                    <p:cond delay="0"/>
+                                  </p:stCondLst>
+                                  <p:childTnLst>
+                                    <p:set>
+                                      <p:cBhvr>
+                                        <p:cTn id="98" dur="1" fill="hold">
+                                          <p:stCondLst>
+                                            <p:cond delay="0"/>
+                                          </p:stCondLst>
+                                        </p:cTn>
+                                        <p:tgtEl>
+                                          <p:spTgt spid="45"/>
+                                        </p:tgtEl>
+                                        <p:attrNameLst>
+                                          <p:attrName>style.visibility</p:attrName>
+                                        </p:attrNameLst>
+                                      </p:cBhvr>
+                                      <p:to>
+                                        <p:strVal val="visible"/>
+                                      </p:to>
+                                    </p:set>
+                                    <p:animEffect transition="in" filter="fade">
+                                      <p:cBhvr>
+                                        <p:cTn id="99" dur="500"/>
+                                        <p:tgtEl>
+                                          <p:spTgt spid="45"/>
+                                        </p:tgtEl>
+                                      </p:cBhvr>
+                                    </p:animEffect>
+                                  </p:childTnLst>
+                                </p:cTn>
+                              </p:par>
+                              <p:par>
+                                <p:cTn id="100" presetID="10" presetClass="entr" presetSubtype="0" fill="hold" grpId="0" nodeType="withEffect">
+                                  <p:stCondLst>
+                                    <p:cond delay="0"/>
+                                  </p:stCondLst>
+                                  <p:childTnLst>
+                                    <p:set>
+                                      <p:cBhvr>
+                                        <p:cTn id="101" dur="1" fill="hold">
+                                          <p:stCondLst>
+                                            <p:cond delay="0"/>
+                                          </p:stCondLst>
+                                        </p:cTn>
+                                        <p:tgtEl>
+                                          <p:spTgt spid="46"/>
+                                        </p:tgtEl>
+                                        <p:attrNameLst>
+                                          <p:attrName>style.visibility</p:attrName>
+                                        </p:attrNameLst>
+                                      </p:cBhvr>
+                                      <p:to>
+                                        <p:strVal val="visible"/>
+                                      </p:to>
+                                    </p:set>
+                                    <p:animEffect transition="in" filter="fade">
+                                      <p:cBhvr>
+                                        <p:cTn id="102" dur="500"/>
+                                        <p:tgtEl>
+                                          <p:spTgt spid="46"/>
+                                        </p:tgtEl>
+                                      </p:cBhvr>
+                                    </p:animEffect>
+                                  </p:childTnLst>
+                                </p:cTn>
+                              </p:par>
+                              <p:par>
+                                <p:cTn id="103" presetID="10" presetClass="entr" presetSubtype="0" fill="hold" grpId="0" nodeType="withEffect">
+                                  <p:stCondLst>
+                                    <p:cond delay="0"/>
+                                  </p:stCondLst>
+                                  <p:childTnLst>
+                                    <p:set>
+                                      <p:cBhvr>
+                                        <p:cTn id="104" dur="1" fill="hold">
+                                          <p:stCondLst>
+                                            <p:cond delay="0"/>
+                                          </p:stCondLst>
+                                        </p:cTn>
+                                        <p:tgtEl>
+                                          <p:spTgt spid="44"/>
+                                        </p:tgtEl>
+                                        <p:attrNameLst>
+                                          <p:attrName>style.visibility</p:attrName>
+                                        </p:attrNameLst>
+                                      </p:cBhvr>
+                                      <p:to>
+                                        <p:strVal val="visible"/>
+                                      </p:to>
+                                    </p:set>
+                                    <p:animEffect transition="in" filter="fade">
+                                      <p:cBhvr>
+                                        <p:cTn id="105" dur="500"/>
+                                        <p:tgtEl>
+                                          <p:spTgt spid="44"/>
                                         </p:tgtEl>
                                       </p:cBhvr>
                                     </p:animEffect>
